--- a/word-drafts/figures/Vision-FigHierarchy.pptx
+++ b/word-drafts/figures/Vision-FigHierarchy.pptx
@@ -4080,7 +4080,7 @@
         <p:spPr>
           <a:xfrm>
             <a:off x="4595812" y="1228725"/>
-            <a:ext cx="485775" cy="123825"/>
+            <a:ext cx="609600" cy="123825"/>
           </a:xfrm>
           <a:prstGeom prst="rect">
             <a:avLst/>
@@ -4152,7 +4152,7 @@
         <p:spPr>
           <a:xfrm>
             <a:off x="2024062" y="2314575"/>
-            <a:ext cx="485775" cy="123825"/>
+            <a:ext cx="609600" cy="123825"/>
           </a:xfrm>
           <a:prstGeom prst="rect">
             <a:avLst/>
@@ -4224,7 +4224,7 @@
         <p:spPr>
           <a:xfrm>
             <a:off x="3309937" y="2314575"/>
-            <a:ext cx="485775" cy="123825"/>
+            <a:ext cx="609600" cy="123825"/>
           </a:xfrm>
           <a:prstGeom prst="rect">
             <a:avLst/>
@@ -4296,7 +4296,7 @@
         <p:spPr>
           <a:xfrm>
             <a:off x="5881687" y="1228725"/>
-            <a:ext cx="485775" cy="123825"/>
+            <a:ext cx="609600" cy="123825"/>
           </a:xfrm>
           <a:prstGeom prst="rect">
             <a:avLst/>
@@ -4368,7 +4368,7 @@
         <p:spPr>
           <a:xfrm>
             <a:off x="5881687" y="2314575"/>
-            <a:ext cx="485775" cy="123825"/>
+            <a:ext cx="609600" cy="123825"/>
           </a:xfrm>
           <a:prstGeom prst="rect">
             <a:avLst/>
@@ -4440,7 +4440,7 @@
         <p:spPr>
           <a:xfrm>
             <a:off x="7167562" y="2314575"/>
-            <a:ext cx="485775" cy="123825"/>
+            <a:ext cx="609600" cy="123825"/>
           </a:xfrm>
           <a:prstGeom prst="rect">
             <a:avLst/>
@@ -4512,7 +4512,7 @@
         <p:spPr>
           <a:xfrm>
             <a:off x="7167562" y="1228725"/>
-            <a:ext cx="485775" cy="123825"/>
+            <a:ext cx="609600" cy="123825"/>
           </a:xfrm>
           <a:prstGeom prst="rect">
             <a:avLst/>
@@ -4584,7 +4584,7 @@
         <p:spPr>
           <a:xfrm>
             <a:off x="9739312" y="2314575"/>
-            <a:ext cx="485775" cy="123825"/>
+            <a:ext cx="609600" cy="123825"/>
           </a:xfrm>
           <a:prstGeom prst="rect">
             <a:avLst/>
@@ -4656,7 +4656,7 @@
         <p:spPr>
           <a:xfrm>
             <a:off x="11025187" y="2314575"/>
-            <a:ext cx="485775" cy="123825"/>
+            <a:ext cx="609600" cy="123825"/>
           </a:xfrm>
           <a:prstGeom prst="rect">
             <a:avLst/>
@@ -4728,7 +4728,7 @@
         <p:spPr>
           <a:xfrm>
             <a:off x="8453437" y="1228725"/>
-            <a:ext cx="485775" cy="123825"/>
+            <a:ext cx="609600" cy="123825"/>
           </a:xfrm>
           <a:prstGeom prst="rect">
             <a:avLst/>
@@ -4800,7 +4800,7 @@
         <p:spPr>
           <a:xfrm>
             <a:off x="7810500" y="3286125"/>
-            <a:ext cx="485775" cy="123825"/>
+            <a:ext cx="609600" cy="123825"/>
           </a:xfrm>
           <a:prstGeom prst="rect">
             <a:avLst/>
@@ -4872,7 +4872,7 @@
         <p:spPr>
           <a:xfrm>
             <a:off x="9096375" y="3286125"/>
-            <a:ext cx="485775" cy="123825"/>
+            <a:ext cx="609600" cy="123825"/>
           </a:xfrm>
           <a:prstGeom prst="rect">
             <a:avLst/>
@@ -4944,7 +4944,7 @@
         <p:spPr>
           <a:xfrm>
             <a:off x="10382250" y="3286125"/>
-            <a:ext cx="485775" cy="123825"/>
+            <a:ext cx="609600" cy="123825"/>
           </a:xfrm>
           <a:prstGeom prst="rect">
             <a:avLst/>
@@ -5016,7 +5016,7 @@
         <p:spPr>
           <a:xfrm>
             <a:off x="11025187" y="1228725"/>
-            <a:ext cx="485775" cy="123825"/>
+            <a:ext cx="609600" cy="123825"/>
           </a:xfrm>
           <a:prstGeom prst="rect">
             <a:avLst/>
